--- a/Reporte 240926.pptx
+++ b/Reporte 240926.pptx
@@ -5,7 +5,7 @@
     <p:sldMasterId id="2147483672" r:id="rId1"/>
   </p:sldMasterIdLst>
   <p:notesMasterIdLst>
-    <p:notesMasterId r:id="rId19"/>
+    <p:notesMasterId r:id="rId20"/>
   </p:notesMasterIdLst>
   <p:sldIdLst>
     <p:sldId id="350" r:id="rId2"/>
@@ -24,22 +24,23 @@
     <p:sldId id="412" r:id="rId15"/>
     <p:sldId id="371" r:id="rId16"/>
     <p:sldId id="413" r:id="rId17"/>
-    <p:sldId id="280" r:id="rId18"/>
+    <p:sldId id="415" r:id="rId18"/>
+    <p:sldId id="280" r:id="rId19"/>
   </p:sldIdLst>
   <p:sldSz cx="9144000" cy="5143500" type="screen16x9"/>
   <p:notesSz cx="6858000" cy="9144000"/>
   <p:embeddedFontLst>
     <p:embeddedFont>
       <p:font typeface="Montserrat" panose="00000500000000000000" pitchFamily="2" charset="0"/>
-      <p:regular r:id="rId20"/>
-      <p:bold r:id="rId21"/>
-      <p:italic r:id="rId22"/>
-      <p:boldItalic r:id="rId23"/>
+      <p:regular r:id="rId21"/>
+      <p:bold r:id="rId22"/>
+      <p:italic r:id="rId23"/>
+      <p:boldItalic r:id="rId24"/>
     </p:embeddedFont>
     <p:embeddedFont>
       <p:font typeface="Montserrat Black" panose="00000A00000000000000" pitchFamily="2" charset="0"/>
-      <p:bold r:id="rId24"/>
-      <p:boldItalic r:id="rId25"/>
+      <p:bold r:id="rId25"/>
+      <p:boldItalic r:id="rId26"/>
     </p:embeddedFont>
   </p:embeddedFontLst>
   <p:defaultTextStyle>
@@ -6777,10 +6778,10 @@
       </p:sp>
       <p:pic>
         <p:nvPicPr>
-          <p:cNvPr id="5" name="Imagen 4">
+          <p:cNvPr id="4" name="Imagen 3">
             <a:extLst>
               <a:ext uri="{FF2B5EF4-FFF2-40B4-BE49-F238E27FC236}">
-                <a16:creationId xmlns:a16="http://schemas.microsoft.com/office/drawing/2014/main" id="{DB8147C3-7D7A-A15F-1A69-DF919B33D683}"/>
+                <a16:creationId xmlns:a16="http://schemas.microsoft.com/office/drawing/2014/main" id="{552C8CBD-6527-FF11-9A19-39864D354CBA}"/>
               </a:ext>
             </a:extLst>
           </p:cNvPr>
@@ -6797,8 +6798,8 @@
         </p:blipFill>
         <p:spPr>
           <a:xfrm>
-            <a:off x="-6725" y="718404"/>
-            <a:ext cx="9144000" cy="3849568"/>
+            <a:off x="0" y="734587"/>
+            <a:ext cx="9144000" cy="3817201"/>
           </a:xfrm>
           <a:prstGeom prst="rect">
             <a:avLst/>
@@ -6883,10 +6884,10 @@
       </p:sp>
       <p:pic>
         <p:nvPicPr>
-          <p:cNvPr id="3" name="Imagen 2">
+          <p:cNvPr id="4" name="Imagen 3">
             <a:extLst>
               <a:ext uri="{FF2B5EF4-FFF2-40B4-BE49-F238E27FC236}">
-                <a16:creationId xmlns:a16="http://schemas.microsoft.com/office/drawing/2014/main" id="{539B2228-BD7F-B965-DBB4-7658DBB64991}"/>
+                <a16:creationId xmlns:a16="http://schemas.microsoft.com/office/drawing/2014/main" id="{1119109F-B64C-2C8A-5B2F-9123081F02B6}"/>
               </a:ext>
             </a:extLst>
           </p:cNvPr>
@@ -6903,8 +6904,8 @@
         </p:blipFill>
         <p:spPr>
           <a:xfrm>
-            <a:off x="0" y="1260722"/>
-            <a:ext cx="9144000" cy="2924455"/>
+            <a:off x="0" y="1163411"/>
+            <a:ext cx="9144000" cy="2959554"/>
           </a:xfrm>
           <a:prstGeom prst="rect">
             <a:avLst/>
@@ -6989,10 +6990,10 @@
       </p:sp>
       <p:pic>
         <p:nvPicPr>
-          <p:cNvPr id="5" name="Imagen 4">
+          <p:cNvPr id="4" name="Imagen 3">
             <a:extLst>
               <a:ext uri="{FF2B5EF4-FFF2-40B4-BE49-F238E27FC236}">
-                <a16:creationId xmlns:a16="http://schemas.microsoft.com/office/drawing/2014/main" id="{D6A740B0-C018-238C-B19F-5A018384C34F}"/>
+                <a16:creationId xmlns:a16="http://schemas.microsoft.com/office/drawing/2014/main" id="{67DA0C24-F1D0-7195-2439-206AF7887901}"/>
               </a:ext>
             </a:extLst>
           </p:cNvPr>
@@ -7009,8 +7010,8 @@
         </p:blipFill>
         <p:spPr>
           <a:xfrm>
-            <a:off x="0" y="589150"/>
-            <a:ext cx="9144000" cy="4108076"/>
+            <a:off x="0" y="568358"/>
+            <a:ext cx="9144000" cy="4149660"/>
           </a:xfrm>
           <a:prstGeom prst="rect">
             <a:avLst/>
@@ -7095,10 +7096,10 @@
       </p:sp>
       <p:pic>
         <p:nvPicPr>
-          <p:cNvPr id="3" name="Imagen 2">
+          <p:cNvPr id="4" name="Imagen 3">
             <a:extLst>
               <a:ext uri="{FF2B5EF4-FFF2-40B4-BE49-F238E27FC236}">
-                <a16:creationId xmlns:a16="http://schemas.microsoft.com/office/drawing/2014/main" id="{93E65B8D-5A6A-062B-48A3-6312D0BCCCF9}"/>
+                <a16:creationId xmlns:a16="http://schemas.microsoft.com/office/drawing/2014/main" id="{1596AAD3-9BDC-393F-A629-C73FF5872C90}"/>
               </a:ext>
             </a:extLst>
           </p:cNvPr>
@@ -7115,8 +7116,8 @@
         </p:blipFill>
         <p:spPr>
           <a:xfrm>
-            <a:off x="0" y="1066397"/>
-            <a:ext cx="9144000" cy="3010705"/>
+            <a:off x="0" y="1154807"/>
+            <a:ext cx="9144000" cy="2976761"/>
           </a:xfrm>
           <a:prstGeom prst="rect">
             <a:avLst/>
@@ -7201,10 +7202,10 @@
       </p:sp>
       <p:pic>
         <p:nvPicPr>
-          <p:cNvPr id="3" name="Imagen 2">
+          <p:cNvPr id="4" name="Imagen 3">
             <a:extLst>
               <a:ext uri="{FF2B5EF4-FFF2-40B4-BE49-F238E27FC236}">
-                <a16:creationId xmlns:a16="http://schemas.microsoft.com/office/drawing/2014/main" id="{CAE11144-0BC0-FCBA-64EF-A6DF2467D9F5}"/>
+                <a16:creationId xmlns:a16="http://schemas.microsoft.com/office/drawing/2014/main" id="{009E711B-CF25-098D-A05D-EEC589CB6152}"/>
               </a:ext>
             </a:extLst>
           </p:cNvPr>
@@ -7221,8 +7222,8 @@
         </p:blipFill>
         <p:spPr>
           <a:xfrm>
-            <a:off x="0" y="1559210"/>
-            <a:ext cx="9144000" cy="2167956"/>
+            <a:off x="0" y="451693"/>
+            <a:ext cx="9144000" cy="4382990"/>
           </a:xfrm>
           <a:prstGeom prst="rect">
             <a:avLst/>
@@ -7313,10 +7314,10 @@
       </p:sp>
       <p:pic>
         <p:nvPicPr>
-          <p:cNvPr id="3" name="Imagen 2">
+          <p:cNvPr id="4" name="Imagen 3">
             <a:extLst>
               <a:ext uri="{FF2B5EF4-FFF2-40B4-BE49-F238E27FC236}">
-                <a16:creationId xmlns:a16="http://schemas.microsoft.com/office/drawing/2014/main" id="{37B8D067-3579-9A68-D51A-9D027EFEDF62}"/>
+                <a16:creationId xmlns:a16="http://schemas.microsoft.com/office/drawing/2014/main" id="{82F3E00F-4662-7B61-5688-31A4A13040EC}"/>
               </a:ext>
             </a:extLst>
           </p:cNvPr>
@@ -7333,8 +7334,8 @@
         </p:blipFill>
         <p:spPr>
           <a:xfrm>
-            <a:off x="0" y="511851"/>
-            <a:ext cx="9144000" cy="4262673"/>
+            <a:off x="-36512" y="684484"/>
+            <a:ext cx="9144000" cy="3917407"/>
           </a:xfrm>
           <a:prstGeom prst="rect">
             <a:avLst/>
@@ -7355,6 +7356,118 @@
 </file>
 
 <file path=ppt/slides/slide17.xml><?xml version="1.0" encoding="utf-8"?>
+<p:sld xmlns:a="http://schemas.openxmlformats.org/drawingml/2006/main" xmlns:r="http://schemas.openxmlformats.org/officeDocument/2006/relationships" xmlns:p="http://schemas.openxmlformats.org/presentationml/2006/main">
+  <p:cSld>
+    <p:bg>
+      <p:bgPr>
+        <a:solidFill>
+          <a:srgbClr val="F8F9FA"/>
+        </a:solidFill>
+        <a:effectLst/>
+      </p:bgPr>
+    </p:bg>
+    <p:spTree>
+      <p:nvGrpSpPr>
+        <p:cNvPr id="1" name="">
+          <a:extLst>
+            <a:ext uri="{FF2B5EF4-FFF2-40B4-BE49-F238E27FC236}">
+              <a16:creationId xmlns:a16="http://schemas.microsoft.com/office/drawing/2014/main" id="{ED3EF019-10BB-36A5-29AB-AF890C99CE2C}"/>
+            </a:ext>
+          </a:extLst>
+        </p:cNvPr>
+        <p:cNvGrpSpPr/>
+        <p:nvPr/>
+      </p:nvGrpSpPr>
+      <p:grpSpPr>
+        <a:xfrm>
+          <a:off x="0" y="0"/>
+          <a:ext cx="0" cy="0"/>
+          <a:chOff x="0" y="0"/>
+          <a:chExt cx="0" cy="0"/>
+        </a:xfrm>
+      </p:grpSpPr>
+      <p:sp>
+        <p:nvSpPr>
+          <p:cNvPr id="5" name="CuadroTexto 4">
+            <a:extLst>
+              <a:ext uri="{FF2B5EF4-FFF2-40B4-BE49-F238E27FC236}">
+                <a16:creationId xmlns:a16="http://schemas.microsoft.com/office/drawing/2014/main" id="{5ED7BEEB-1D81-4758-2881-53D2F1769A40}"/>
+              </a:ext>
+            </a:extLst>
+          </p:cNvPr>
+          <p:cNvSpPr txBox="1"/>
+          <p:nvPr/>
+        </p:nvSpPr>
+        <p:spPr>
+          <a:xfrm>
+            <a:off x="1926166" y="88135"/>
+            <a:ext cx="5291667" cy="307777"/>
+          </a:xfrm>
+          <a:prstGeom prst="rect">
+            <a:avLst/>
+          </a:prstGeom>
+          <a:noFill/>
+        </p:spPr>
+        <p:txBody>
+          <a:bodyPr wrap="square" rtlCol="0">
+            <a:spAutoFit/>
+          </a:bodyPr>
+          <a:lstStyle/>
+          <a:p>
+            <a:pPr algn="ctr"/>
+            <a:r>
+              <a:rPr lang="es-MX" b="1" dirty="0">
+                <a:latin typeface="Montserrat" pitchFamily="2" charset="0"/>
+              </a:rPr>
+              <a:t>Opinión emitida por radioescuchas</a:t>
+            </a:r>
+          </a:p>
+        </p:txBody>
+      </p:sp>
+      <p:pic>
+        <p:nvPicPr>
+          <p:cNvPr id="3" name="Imagen 2">
+            <a:extLst>
+              <a:ext uri="{FF2B5EF4-FFF2-40B4-BE49-F238E27FC236}">
+                <a16:creationId xmlns:a16="http://schemas.microsoft.com/office/drawing/2014/main" id="{309F009F-A13E-584A-D8E0-A5930D8EC354}"/>
+              </a:ext>
+            </a:extLst>
+          </p:cNvPr>
+          <p:cNvPicPr>
+            <a:picLocks noChangeAspect="1"/>
+          </p:cNvPicPr>
+          <p:nvPr/>
+        </p:nvPicPr>
+        <p:blipFill>
+          <a:blip r:embed="rId2"/>
+          <a:stretch>
+            <a:fillRect/>
+          </a:stretch>
+        </p:blipFill>
+        <p:spPr>
+          <a:xfrm>
+            <a:off x="1724024" y="719138"/>
+            <a:ext cx="5695950" cy="3848100"/>
+          </a:xfrm>
+          <a:prstGeom prst="rect">
+            <a:avLst/>
+          </a:prstGeom>
+        </p:spPr>
+      </p:pic>
+    </p:spTree>
+    <p:extLst>
+      <p:ext uri="{BB962C8B-B14F-4D97-AF65-F5344CB8AC3E}">
+        <p14:creationId xmlns:p14="http://schemas.microsoft.com/office/powerpoint/2010/main" val="1437345016"/>
+      </p:ext>
+    </p:extLst>
+  </p:cSld>
+  <p:clrMapOvr>
+    <a:masterClrMapping/>
+  </p:clrMapOvr>
+</p:sld>
+</file>
+
+<file path=ppt/slides/slide18.xml><?xml version="1.0" encoding="utf-8"?>
 <p:sld xmlns:a="http://schemas.openxmlformats.org/drawingml/2006/main" xmlns:r="http://schemas.openxmlformats.org/officeDocument/2006/relationships" xmlns:p="http://schemas.openxmlformats.org/presentationml/2006/main">
   <p:cSld>
     <p:spTree>
